--- a/deliverables/figures/seven-capabilities-20261011/mlkem-overview-v2.pptx
+++ b/deliverables/figures/seven-capabilities-20261011/mlkem-overview-v2.pptx
@@ -3502,7 +3502,7 @@
               </a:r>
             </a:p>
             <a:p>
-              <a:pPr lvl="1" algn="ctr"/>
+              <a:pPr algn="ctr"/>
               <a:r>
                 <a:rPr lang="zh-CN" altLang="en-US" sz="1600" dirty="0">
                   <a:solidFill>
